--- a/doc-mk/DP1/DP1-complement-design-tactics.pptx
+++ b/doc-mk/DP1/DP1-complement-design-tactics.pptx
@@ -4608,7 +4608,7 @@
                   <a:schemeClr val="bg1"/>
                 </a:solidFill>
               </a:rPr>
-              <a:t>DP1 선택 구조(C2)의 보완 설계 택틱 - 제안</a:t>
+              <a:t>DP1 보완 설계 택틱 - 제안 (선택 구조 C2 기준)</a:t>
             </a:r>
             <a:r>
               <a:rPr lang="en-US" altLang="ko-KR" sz="1400" b="1" dirty="0">
@@ -5107,7 +5107,7 @@
                 <a:latin typeface="맑은 고딕"/>
                 <a:ea typeface="맑은 고딕"/>
               </a:rPr>
-              <a:t>QA4 ★★: 신규 AI data type 추가 시 변경 modu</a:t>
+              <a:t>QA4: 신규 AI data class 추가 시 C2 module 3개</a:t>
             </a:r>
           </a:p>
           <a:p>
@@ -5120,7 +5120,7 @@
                 <a:latin typeface="맑은 고딕"/>
                 <a:ea typeface="맑은 고딕"/>
               </a:rPr>
-              <a:t>le 4개 (class metadata, Behavior Monitor featur</a:t>
+              <a:t>(C1 1개), 신규 memory는 선호 목록에 명시해</a:t>
             </a:r>
           </a:p>
           <a:p>
@@ -5133,7 +5133,7 @@
                 <a:latin typeface="맑은 고딕"/>
                 <a:ea typeface="맑은 고딕"/>
               </a:rPr>
-              <a:t>e, Predictor input, Destination 선호)</a:t>
+              <a:t>야 사용됨(C1은 코드 변경 없이 사용)</a:t>
             </a:r>
           </a:p>
         </p:txBody>
@@ -5314,7 +5314,7 @@
                 <a:latin typeface="맑은 고딕"/>
                 <a:ea typeface="맑은 고딕"/>
               </a:rPr>
-              <a:t>[C] 논증, 미구현. 기대: 변경 module 4 -&gt; </a:t>
+              <a:t>[C] 논증, 미구현. 기대: 변경 module 3 -&gt; </a:t>
             </a:r>
           </a:p>
           <a:p>

--- a/doc-mk/DP1/DP1-complement-design-tactics.pptx
+++ b/doc-mk/DP1/DP1-complement-design-tactics.pptx
@@ -5439,7 +5439,7 @@
                 <a:latin typeface="맑은 고딕"/>
                 <a:ea typeface="맑은 고딕"/>
               </a:rPr>
-              <a:t>migration 비용: C2 1,239 GiB (C1 110), 링크 </a:t>
+              <a:t>migration 비용: C2 1,339 GiB (C1 138), 링크 </a:t>
             </a:r>
           </a:p>
           <a:p>
@@ -5452,7 +5452,7 @@
                 <a:latin typeface="맑은 고딕"/>
                 <a:ea typeface="맑은 고딕"/>
               </a:rPr>
-              <a:t>점유 9.5% (C1 1.3%)</a:t>
+              <a:t>점유 10.5% (C1 1.6%)</a:t>
             </a:r>
           </a:p>
         </p:txBody>
@@ -6090,7 +6090,7 @@
                 <a:latin typeface="맑은 고딕"/>
                 <a:ea typeface="맑은 고딕"/>
               </a:rPr>
-              <a:t>decision overhead 105 ms/run (C1 3 ms). SLO</a:t>
+              <a:t>decision overhead 111 ms/run (C1 3 ms). SLO</a:t>
             </a:r>
           </a:p>
           <a:p>

--- a/doc-mk/DP1/DP1-complement-design-tactics.pptx
+++ b/doc-mk/DP1/DP1-complement-design-tactics.pptx
@@ -5577,7 +5577,7 @@
                 <a:latin typeface="맑은 고딕"/>
                 <a:ea typeface="맑은 고딕"/>
               </a:rPr>
-              <a:t>QA1 QA3</a:t>
+              <a:t>QA1 QA2</a:t>
             </a:r>
           </a:p>
         </p:txBody>

--- a/doc-mk/DP1/DP1-complement-design-tactics.pptx
+++ b/doc-mk/DP1/DP1-complement-design-tactics.pptx
@@ -4608,7 +4608,7 @@
                   <a:schemeClr val="bg1"/>
                 </a:solidFill>
               </a:rPr>
-              <a:t>DP1 보완 설계 택틱 - 제안 (선택 구조 C2 기준)</a:t>
+              <a:t>DP1 보완 설계 택틱 - 선택 구조 C1 기준</a:t>
             </a:r>
             <a:r>
               <a:rPr lang="en-US" altLang="ko-KR" sz="1400" b="1" dirty="0">
@@ -4785,7 +4785,7 @@
         <p:spPr>
           <a:xfrm>
             <a:off x="777240" y="1097280"/>
-            <a:ext cx="2926080" cy="310896"/>
+            <a:ext cx="3291840" cy="310896"/>
           </a:xfrm>
           <a:prstGeom prst="rect">
             <a:avLst/>
@@ -4840,8 +4840,8 @@
         </p:nvSpPr>
         <p:spPr>
           <a:xfrm>
-            <a:off x="3703320" y="1097280"/>
-            <a:ext cx="4572000" cy="310896"/>
+            <a:off x="4069080" y="1097280"/>
+            <a:ext cx="4480560" cy="310896"/>
           </a:xfrm>
           <a:prstGeom prst="rect">
             <a:avLst/>
@@ -4896,8 +4896,8 @@
         </p:nvSpPr>
         <p:spPr>
           <a:xfrm>
-            <a:off x="8275320" y="1097280"/>
-            <a:ext cx="914400" cy="310896"/>
+            <a:off x="8549640" y="1097280"/>
+            <a:ext cx="822960" cy="310896"/>
           </a:xfrm>
           <a:prstGeom prst="rect">
             <a:avLst/>
@@ -4952,8 +4952,8 @@
         </p:nvSpPr>
         <p:spPr>
           <a:xfrm>
-            <a:off x="9189720" y="1097280"/>
-            <a:ext cx="2606040" cy="310896"/>
+            <a:off x="9372600" y="1097280"/>
+            <a:ext cx="2423160" cy="310896"/>
           </a:xfrm>
           <a:prstGeom prst="rect">
             <a:avLst/>
@@ -5044,14 +5044,14 @@
           <a:p>
             <a:pPr algn="ctr"/>
             <a:r>
-              <a:rPr sz="1000" b="1">
+              <a:rPr sz="950" b="1">
                 <a:solidFill>
                   <a:srgbClr val="1A1A1A"/>
                 </a:solidFill>
                 <a:latin typeface="맑은 고딕"/>
                 <a:ea typeface="맑은 고딕"/>
               </a:rPr>
-              <a:t>W1</a:t>
+              <a:t>T1</a:t>
             </a:r>
           </a:p>
         </p:txBody>
@@ -5065,7 +5065,7 @@
         <p:spPr>
           <a:xfrm>
             <a:off x="777240" y="1463040"/>
-            <a:ext cx="2926080" cy="1024128"/>
+            <a:ext cx="3291840" cy="1024128"/>
           </a:xfrm>
           <a:prstGeom prst="rect">
             <a:avLst/>
@@ -5100,40 +5100,27 @@
           <a:p>
             <a:pPr algn="l"/>
             <a:r>
-              <a:rPr sz="1000" b="0">
+              <a:rPr sz="950" b="0">
                 <a:solidFill>
                   <a:srgbClr val="1A1A1A"/>
                 </a:solidFill>
                 <a:latin typeface="맑은 고딕"/>
                 <a:ea typeface="맑은 고딕"/>
               </a:rPr>
-              <a:t>QA4: 신규 AI data class 추가 시 C2 module 3개</a:t>
+              <a:t>자원 압박에만 반응하는 C1은 처리량 x1.05, TTFT P99 x1</a:t>
             </a:r>
           </a:p>
           <a:p>
             <a:pPr algn="l"/>
             <a:r>
-              <a:rPr sz="1000" b="0">
+              <a:rPr sz="950" b="0">
                 <a:solidFill>
                   <a:srgbClr val="1A1A1A"/>
                 </a:solidFill>
                 <a:latin typeface="맑은 고딕"/>
                 <a:ea typeface="맑은 고딕"/>
               </a:rPr>
-              <a:t>(C1 1개), 신규 memory는 선호 목록에 명시해</a:t>
-            </a:r>
-          </a:p>
-          <a:p>
-            <a:pPr algn="l"/>
-            <a:r>
-              <a:rPr sz="1000" b="0">
-                <a:solidFill>
-                  <a:srgbClr val="1A1A1A"/>
-                </a:solidFill>
-                <a:latin typeface="맑은 고딕"/>
-                <a:ea typeface="맑은 고딕"/>
-              </a:rPr>
-              <a:t>야 사용됨(C1은 코드 변경 없이 사용)</a:t>
+              <a:t>.27(악화)로 C2(x1.42)에 크게 못 미침</a:t>
             </a:r>
           </a:p>
         </p:txBody>
@@ -5146,8 +5133,8 @@
         </p:nvSpPr>
         <p:spPr>
           <a:xfrm>
-            <a:off x="3703320" y="1463040"/>
-            <a:ext cx="4572000" cy="1024128"/>
+            <a:off x="4069080" y="1463040"/>
+            <a:ext cx="4480560" cy="1024128"/>
           </a:xfrm>
           <a:prstGeom prst="rect">
             <a:avLst/>
@@ -5182,27 +5169,40 @@
           <a:p>
             <a:pPr algn="l"/>
             <a:r>
-              <a:rPr sz="1000" b="0">
+              <a:rPr sz="950" b="0">
                 <a:solidFill>
                   <a:srgbClr val="1A1A1A"/>
                 </a:solidFill>
                 <a:latin typeface="맑은 고딕"/>
                 <a:ea typeface="맑은 고딕"/>
               </a:rPr>
-              <a:t>T1 type 특성을 descriptor(데이터)로 외부화. descriptor가 없는 class는 type</a:t>
+              <a:t>정적 Data-Memory Affinity 승격 추가: operation class·shape 힌트와 접근 비용 </a:t>
             </a:r>
           </a:p>
           <a:p>
             <a:pPr algn="l"/>
             <a:r>
-              <a:rPr sz="1000" b="0">
+              <a:rPr sz="950" b="0">
                 <a:solidFill>
                   <a:srgbClr val="1A1A1A"/>
                 </a:solidFill>
                 <a:latin typeface="맑은 고딕"/>
                 <a:ea typeface="맑은 고딕"/>
               </a:rPr>
-              <a:t>-agnostic 경로로 처리 -&gt; 신규 type 추가 = descriptor 1개</a:t>
+              <a:t>추정으로 'HBM에 있어야 SLO를 만족하는' 객체를 승격, 자리가 없으면 정적 </a:t>
+            </a:r>
+          </a:p>
+          <a:p>
+            <a:pPr algn="l"/>
+            <a:r>
+              <a:rPr sz="950" b="0">
+                <a:solidFill>
+                  <a:srgbClr val="1A1A1A"/>
+                </a:solidFill>
+                <a:latin typeface="맑은 고딕"/>
+                <a:ea typeface="맑은 고딕"/>
+              </a:rPr>
+              <a:t>페널티가 작은 HBM 거주 객체와 교환</a:t>
             </a:r>
           </a:p>
         </p:txBody>
@@ -5215,8 +5215,8 @@
         </p:nvSpPr>
         <p:spPr>
           <a:xfrm>
-            <a:off x="8275320" y="1463040"/>
-            <a:ext cx="914400" cy="1024128"/>
+            <a:off x="8549640" y="1463040"/>
+            <a:ext cx="822960" cy="1024128"/>
           </a:xfrm>
           <a:prstGeom prst="rect">
             <a:avLst/>
@@ -5251,14 +5251,14 @@
           <a:p>
             <a:pPr algn="ctr"/>
             <a:r>
-              <a:rPr sz="1000" b="0">
+              <a:rPr sz="950" b="0">
                 <a:solidFill>
                   <a:srgbClr val="1A1A1A"/>
                 </a:solidFill>
                 <a:latin typeface="맑은 고딕"/>
                 <a:ea typeface="맑은 고딕"/>
               </a:rPr>
-              <a:t>QA4</a:t>
+              <a:t>QA1 QA2</a:t>
             </a:r>
           </a:p>
         </p:txBody>
@@ -5271,8 +5271,8 @@
         </p:nvSpPr>
         <p:spPr>
           <a:xfrm>
-            <a:off x="9189720" y="1463040"/>
-            <a:ext cx="2606040" cy="1024128"/>
+            <a:off x="9372600" y="1463040"/>
+            <a:ext cx="2423160" cy="1024128"/>
           </a:xfrm>
           <a:prstGeom prst="rect">
             <a:avLst/>
@@ -5307,27 +5307,40 @@
           <a:p>
             <a:pPr algn="l"/>
             <a:r>
-              <a:rPr sz="1000" b="0">
+              <a:rPr sz="950" b="0">
                 <a:solidFill>
                   <a:srgbClr val="1A1A1A"/>
                 </a:solidFill>
                 <a:latin typeface="맑은 고딕"/>
                 <a:ea typeface="맑은 고딕"/>
               </a:rPr>
-              <a:t>[C] 논증, 미구현. 기대: 변경 module 3 -&gt; </a:t>
+              <a:t>[B] 구현·측정됨: 처리량 x1.05 -&gt; x1.30, </a:t>
             </a:r>
           </a:p>
           <a:p>
             <a:pPr algn="l"/>
             <a:r>
-              <a:rPr sz="1000" b="0">
+              <a:rPr sz="950" b="0">
                 <a:solidFill>
                   <a:srgbClr val="1A1A1A"/>
                 </a:solidFill>
                 <a:latin typeface="맑은 고딕"/>
                 <a:ea typeface="맑은 고딕"/>
               </a:rPr>
-              <a:t>1~2 (미검증)</a:t>
+              <a:t>QA2 ★★ -&gt; ★★★ (제거 변형 비교, 결과</a:t>
+            </a:r>
+          </a:p>
+          <a:p>
+            <a:pPr algn="l"/>
+            <a:r>
+              <a:rPr sz="950" b="0">
+                <a:solidFill>
+                  <a:srgbClr val="1A1A1A"/>
+                </a:solidFill>
+                <a:latin typeface="맑은 고딕"/>
+                <a:ea typeface="맑은 고딕"/>
+              </a:rPr>
+              <a:t>4.7). 선택이 C2에서 C1로 바뀜</a:t>
             </a:r>
           </a:p>
         </p:txBody>
@@ -5376,14 +5389,14 @@
           <a:p>
             <a:pPr algn="ctr"/>
             <a:r>
-              <a:rPr sz="1000" b="1">
+              <a:rPr sz="950" b="1">
                 <a:solidFill>
                   <a:srgbClr val="1A1A1A"/>
                 </a:solidFill>
                 <a:latin typeface="맑은 고딕"/>
                 <a:ea typeface="맑은 고딕"/>
               </a:rPr>
-              <a:t>W2</a:t>
+              <a:t>T2</a:t>
             </a:r>
           </a:p>
         </p:txBody>
@@ -5397,7 +5410,7 @@
         <p:spPr>
           <a:xfrm>
             <a:off x="777240" y="2542032"/>
-            <a:ext cx="2926080" cy="1024128"/>
+            <a:ext cx="3291840" cy="1024128"/>
           </a:xfrm>
           <a:prstGeom prst="rect">
             <a:avLst/>
@@ -5432,27 +5445,40 @@
           <a:p>
             <a:pPr algn="l"/>
             <a:r>
-              <a:rPr sz="1000" b="0">
+              <a:rPr sz="950" b="0">
                 <a:solidFill>
                   <a:srgbClr val="1A1A1A"/>
                 </a:solidFill>
                 <a:latin typeface="맑은 고딕"/>
                 <a:ea typeface="맑은 고딕"/>
               </a:rPr>
-              <a:t>migration 비용: C2 1,339 GiB (C1 138), 링크 </a:t>
+              <a:t>TTFT P99 꼬리 개선 없음(x1.04). 진단한 시나리오에서 이</a:t>
             </a:r>
           </a:p>
           <a:p>
             <a:pPr algn="l"/>
             <a:r>
-              <a:rPr sz="1000" b="0">
+              <a:rPr sz="950" b="0">
                 <a:solidFill>
                   <a:srgbClr val="1A1A1A"/>
                 </a:solidFill>
                 <a:latin typeface="맑은 고딕"/>
                 <a:ea typeface="맑은 고딕"/>
               </a:rPr>
-              <a:t>점유 10.5% (C1 1.6%)</a:t>
+              <a:t>득 없는 재배치(DRAM 링크 포화 신호에 반응)가 링크를 </a:t>
+            </a:r>
+          </a:p>
+          <a:p>
+            <a:pPr algn="l"/>
+            <a:r>
+              <a:rPr sz="950" b="0">
+                <a:solidFill>
+                  <a:srgbClr val="1A1A1A"/>
+                </a:solidFill>
+                <a:latin typeface="맑은 고딕"/>
+                <a:ea typeface="맑은 고딕"/>
+              </a:rPr>
+              <a:t>나눠 씀</a:t>
             </a:r>
           </a:p>
         </p:txBody>
@@ -5465,8 +5491,8 @@
         </p:nvSpPr>
         <p:spPr>
           <a:xfrm>
-            <a:off x="3703320" y="2542032"/>
-            <a:ext cx="4572000" cy="1024128"/>
+            <a:off x="4069080" y="2542032"/>
+            <a:ext cx="4480560" cy="1024128"/>
           </a:xfrm>
           <a:prstGeom prst="rect">
             <a:avLst/>
@@ -5501,27 +5527,27 @@
           <a:p>
             <a:pPr algn="l"/>
             <a:r>
-              <a:rPr sz="1000" b="0">
+              <a:rPr sz="950" b="0">
                 <a:solidFill>
                   <a:srgbClr val="1A1A1A"/>
                 </a:solidFill>
                 <a:latin typeface="맑은 고딕"/>
                 <a:ea typeface="맑은 고딕"/>
               </a:rPr>
-              <a:t>T2 link-time budget + 이득/비용 gating (simulator 적용). traffic class 우선</a:t>
+              <a:t>재배치에도 이득/비용 gating 적용(C2에 있는 것과 같은 방식): 예상 서빙 이득</a:t>
             </a:r>
           </a:p>
           <a:p>
             <a:pPr algn="l"/>
             <a:r>
-              <a:rPr sz="1000" b="0">
+              <a:rPr sz="950" b="0">
                 <a:solidFill>
                   <a:srgbClr val="1A1A1A"/>
                 </a:solidFill>
                 <a:latin typeface="맑은 고딕"/>
                 <a:ea typeface="맑은 고딕"/>
               </a:rPr>
-              <a:t>순위(demand &gt; prefetch &gt; demotion). replica가 있으면 DROP 우선</a:t>
+              <a:t>이 이동 비용보다 작으면 이동하지 않음</a:t>
             </a:r>
           </a:p>
         </p:txBody>
@@ -5534,8 +5560,8 @@
         </p:nvSpPr>
         <p:spPr>
           <a:xfrm>
-            <a:off x="8275320" y="2542032"/>
-            <a:ext cx="914400" cy="1024128"/>
+            <a:off x="8549640" y="2542032"/>
+            <a:ext cx="822960" cy="1024128"/>
           </a:xfrm>
           <a:prstGeom prst="rect">
             <a:avLst/>
@@ -5570,14 +5596,14 @@
           <a:p>
             <a:pPr algn="ctr"/>
             <a:r>
-              <a:rPr sz="1000" b="0">
+              <a:rPr sz="950" b="0">
                 <a:solidFill>
                   <a:srgbClr val="1A1A1A"/>
                 </a:solidFill>
                 <a:latin typeface="맑은 고딕"/>
                 <a:ea typeface="맑은 고딕"/>
               </a:rPr>
-              <a:t>QA1 QA2</a:t>
+              <a:t>QA2</a:t>
             </a:r>
           </a:p>
         </p:txBody>
@@ -5590,8 +5616,8 @@
         </p:nvSpPr>
         <p:spPr>
           <a:xfrm>
-            <a:off x="9189720" y="2542032"/>
-            <a:ext cx="2606040" cy="1024128"/>
+            <a:off x="9372600" y="2542032"/>
+            <a:ext cx="2423160" cy="1024128"/>
           </a:xfrm>
           <a:prstGeom prst="rect">
             <a:avLst/>
@@ -5626,27 +5652,27 @@
           <a:p>
             <a:pPr algn="l"/>
             <a:r>
-              <a:rPr sz="1000" b="0">
+              <a:rPr sz="950" b="0">
                 <a:solidFill>
                   <a:srgbClr val="1A1A1A"/>
                 </a:solidFill>
                 <a:latin typeface="맑은 고딕"/>
                 <a:ea typeface="맑은 고딕"/>
               </a:rPr>
-              <a:t>budget/gating [B] 적용. class 우선순위·D</a:t>
+              <a:t>[C] 미구현. 원인은 `cb_kv_8k_b32` 한 시</a:t>
             </a:r>
           </a:p>
           <a:p>
             <a:pPr algn="l"/>
             <a:r>
-              <a:rPr sz="1000" b="0">
+              <a:rPr sz="950" b="0">
                 <a:solidFill>
                   <a:srgbClr val="1A1A1A"/>
                 </a:solidFill>
                 <a:latin typeface="맑은 고딕"/>
                 <a:ea typeface="맑은 고딕"/>
               </a:rPr>
-              <a:t>ROP 우선은 [C]</a:t>
+              <a:t>나리오에서만 진단</a:t>
             </a:r>
           </a:p>
         </p:txBody>
@@ -5695,14 +5721,14 @@
           <a:p>
             <a:pPr algn="ctr"/>
             <a:r>
-              <a:rPr sz="1000" b="1">
+              <a:rPr sz="950" b="1">
                 <a:solidFill>
                   <a:srgbClr val="1A1A1A"/>
                 </a:solidFill>
                 <a:latin typeface="맑은 고딕"/>
                 <a:ea typeface="맑은 고딕"/>
               </a:rPr>
-              <a:t>W3</a:t>
+              <a:t>T3</a:t>
             </a:r>
           </a:p>
         </p:txBody>
@@ -5716,7 +5742,7 @@
         <p:spPr>
           <a:xfrm>
             <a:off x="777240" y="3621024"/>
-            <a:ext cx="2926080" cy="1024128"/>
+            <a:ext cx="3291840" cy="1024128"/>
           </a:xfrm>
           <a:prstGeom prst="rect">
             <a:avLst/>
@@ -5751,40 +5777,40 @@
           <a:p>
             <a:pPr algn="l"/>
             <a:r>
-              <a:rPr sz="1000" b="0">
+              <a:rPr sz="950" b="0">
                 <a:solidFill>
                   <a:srgbClr val="1A1A1A"/>
                 </a:solidFill>
                 <a:latin typeface="맑은 고딕"/>
                 <a:ea typeface="맑은 고딕"/>
               </a:rPr>
-              <a:t>예측 의존: C2는 predictor가 틀리면 잘못된 mig</a:t>
+              <a:t>같은 종류(KV) 안의 hot/cold를 구분하지 못해 C2보다 처</a:t>
             </a:r>
           </a:p>
           <a:p>
             <a:pPr algn="l"/>
             <a:r>
-              <a:rPr sz="1000" b="0">
+              <a:rPr sz="950" b="0">
                 <a:solidFill>
                   <a:srgbClr val="1A1A1A"/>
                 </a:solidFill>
                 <a:latin typeface="맑은 고딕"/>
                 <a:ea typeface="맑은 고딕"/>
               </a:rPr>
-              <a:t>ration. 오차 e=0.6까지는 우위 유지(lognormal </a:t>
+              <a:t>리량이 낮음(x1.30 대 x1.42), QA1 별 경계(1.30) 바로 아</a:t>
             </a:r>
           </a:p>
           <a:p>
             <a:pPr algn="l"/>
             <a:r>
-              <a:rPr sz="1000" b="0">
+              <a:rPr sz="950" b="0">
                 <a:solidFill>
                   <a:srgbClr val="1A1A1A"/>
                 </a:solidFill>
                 <a:latin typeface="맑은 고딕"/>
                 <a:ea typeface="맑은 고딕"/>
               </a:rPr>
-              <a:t>한 종류, 결과 4.6)</a:t>
+              <a:t>래</a:t>
             </a:r>
           </a:p>
         </p:txBody>
@@ -5797,8 +5823,8 @@
         </p:nvSpPr>
         <p:spPr>
           <a:xfrm>
-            <a:off x="3703320" y="3621024"/>
-            <a:ext cx="4572000" cy="1024128"/>
+            <a:off x="4069080" y="3621024"/>
+            <a:ext cx="4480560" cy="1024128"/>
           </a:xfrm>
           <a:prstGeom prst="rect">
             <a:avLst/>
@@ -5833,27 +5859,27 @@
           <a:p>
             <a:pPr algn="l"/>
             <a:r>
-              <a:rPr sz="1000" b="0">
+              <a:rPr sz="950" b="0">
                 <a:solidFill>
                   <a:srgbClr val="1A1A1A"/>
                 </a:solidFill>
                 <a:latin typeface="맑은 고딕"/>
                 <a:ea typeface="맑은 고딕"/>
               </a:rPr>
-              <a:t>T3 신뢰도 gating (낮으면 C1의 resource-pressure 트리거로 대체) + 이득 </a:t>
+              <a:t>affinity 힌트에 경량 접근 신호(최근 접근 시각, 접근 횟수)를 추가해 구조를 typ</a:t>
             </a:r>
           </a:p>
           <a:p>
             <a:pPr algn="l"/>
             <a:r>
-              <a:rPr sz="1000" b="0">
+              <a:rPr sz="950" b="0">
                 <a:solidFill>
                   <a:srgbClr val="1A1A1A"/>
                 </a:solidFill>
                 <a:latin typeface="맑은 고딕"/>
                 <a:ea typeface="맑은 고딕"/>
               </a:rPr>
-              <a:t>미실현 시 자동 중단(do-no-harm guard) + hysteresis</a:t>
+              <a:t>e-agnostic으로 유지하면서 hot/cold 승격 반영</a:t>
             </a:r>
           </a:p>
         </p:txBody>
@@ -5866,8 +5892,8 @@
         </p:nvSpPr>
         <p:spPr>
           <a:xfrm>
-            <a:off x="8275320" y="3621024"/>
-            <a:ext cx="914400" cy="1024128"/>
+            <a:off x="8549640" y="3621024"/>
+            <a:ext cx="822960" cy="1024128"/>
           </a:xfrm>
           <a:prstGeom prst="rect">
             <a:avLst/>
@@ -5902,14 +5928,14 @@
           <a:p>
             <a:pPr algn="ctr"/>
             <a:r>
-              <a:rPr sz="1000" b="0">
+              <a:rPr sz="950" b="0">
                 <a:solidFill>
                   <a:srgbClr val="1A1A1A"/>
                 </a:solidFill>
                 <a:latin typeface="맑은 고딕"/>
                 <a:ea typeface="맑은 고딕"/>
               </a:rPr>
-              <a:t>QA1 안정성</a:t>
+              <a:t>QA1</a:t>
             </a:r>
           </a:p>
         </p:txBody>
@@ -5922,8 +5948,8 @@
         </p:nvSpPr>
         <p:spPr>
           <a:xfrm>
-            <a:off x="9189720" y="3621024"/>
-            <a:ext cx="2606040" cy="1024128"/>
+            <a:off x="9372600" y="3621024"/>
+            <a:ext cx="2423160" cy="1024128"/>
           </a:xfrm>
           <a:prstGeom prst="rect">
             <a:avLst/>
@@ -5958,27 +5984,27 @@
           <a:p>
             <a:pPr algn="l"/>
             <a:r>
-              <a:rPr sz="1000" b="0">
+              <a:rPr sz="950" b="0">
                 <a:solidFill>
                   <a:srgbClr val="1A1A1A"/>
                 </a:solidFill>
                 <a:latin typeface="맑은 고딕"/>
                 <a:ea typeface="맑은 고딕"/>
               </a:rPr>
-              <a:t>[C] 미구현. 실제 workload 이동 robustnes</a:t>
+              <a:t>[C] 미구현. C2의 behavior 모듈 전체를 들</a:t>
             </a:r>
           </a:p>
           <a:p>
             <a:pPr algn="l"/>
             <a:r>
-              <a:rPr sz="1000" b="0">
+              <a:rPr sz="950" b="0">
                 <a:solidFill>
                   <a:srgbClr val="1A1A1A"/>
                 </a:solidFill>
                 <a:latin typeface="맑은 고딕"/>
                 <a:ea typeface="맑은 고딕"/>
               </a:rPr>
-              <a:t>s는 미확인</a:t>
+              <a:t>이지 않는 대안</a:t>
             </a:r>
           </a:p>
         </p:txBody>
@@ -6027,14 +6053,14 @@
           <a:p>
             <a:pPr algn="ctr"/>
             <a:r>
-              <a:rPr sz="1000" b="1">
+              <a:rPr sz="950" b="1">
                 <a:solidFill>
                   <a:srgbClr val="1A1A1A"/>
                 </a:solidFill>
                 <a:latin typeface="맑은 고딕"/>
                 <a:ea typeface="맑은 고딕"/>
               </a:rPr>
-              <a:t>W4</a:t>
+              <a:t>T4</a:t>
             </a:r>
           </a:p>
         </p:txBody>
@@ -6048,7 +6074,7 @@
         <p:spPr>
           <a:xfrm>
             <a:off x="777240" y="4700016"/>
-            <a:ext cx="2926080" cy="1024128"/>
+            <a:ext cx="3291840" cy="1024128"/>
           </a:xfrm>
           <a:prstGeom prst="rect">
             <a:avLst/>
@@ -6083,27 +6109,40 @@
           <a:p>
             <a:pPr algn="l"/>
             <a:r>
-              <a:rPr sz="1000" b="0">
+              <a:rPr sz="950" b="0">
                 <a:solidFill>
                   <a:srgbClr val="1A1A1A"/>
                 </a:solidFill>
                 <a:latin typeface="맑은 고딕"/>
                 <a:ea typeface="맑은 고딕"/>
               </a:rPr>
-              <a:t>decision overhead 111 ms/run (C1 3 ms). SLO</a:t>
+              <a:t>정적 힌트(operation class·shape)가 틀리거나 신규 메모</a:t>
             </a:r>
           </a:p>
           <a:p>
             <a:pPr algn="l"/>
             <a:r>
-              <a:rPr sz="1000" b="0">
+              <a:rPr sz="950" b="0">
                 <a:solidFill>
                   <a:srgbClr val="1A1A1A"/>
                 </a:solidFill>
                 <a:latin typeface="맑은 고딕"/>
                 <a:ea typeface="맑은 고딕"/>
               </a:rPr>
-              <a:t>(초 단위) 영향은 작음</a:t>
+              <a:t>리에 없으면 승격이 오작동. 승격이 공유 접근 비용 추정</a:t>
+            </a:r>
+          </a:p>
+          <a:p>
+            <a:pPr algn="l"/>
+            <a:r>
+              <a:rPr sz="950" b="0">
+                <a:solidFill>
+                  <a:srgbClr val="1A1A1A"/>
+                </a:solidFill>
+                <a:latin typeface="맑은 고딕"/>
+                <a:ea typeface="맑은 고딕"/>
+              </a:rPr>
+              <a:t>기에 의존</a:t>
             </a:r>
           </a:p>
         </p:txBody>
@@ -6116,8 +6155,8 @@
         </p:nvSpPr>
         <p:spPr>
           <a:xfrm>
-            <a:off x="3703320" y="4700016"/>
-            <a:ext cx="4572000" cy="1024128"/>
+            <a:off x="4069080" y="4700016"/>
+            <a:ext cx="4480560" cy="1024128"/>
           </a:xfrm>
           <a:prstGeom prst="rect">
             <a:avLst/>
@@ -6152,27 +6191,27 @@
           <a:p>
             <a:pPr algn="l"/>
             <a:r>
-              <a:rPr sz="1000" b="0">
+              <a:rPr sz="950" b="0">
                 <a:solidFill>
                   <a:srgbClr val="1A1A1A"/>
                 </a:solidFill>
                 <a:latin typeface="맑은 고딕"/>
                 <a:ea typeface="맑은 고딕"/>
               </a:rPr>
-              <a:t>T4 event coalescing(구현), feature 점진 갱신, decision을 critical path 밖에</a:t>
+              <a:t>힌트를 Memory Backend I/F의 descriptor에서 자동 도출하고, 힌트가 없으면 </a:t>
             </a:r>
           </a:p>
           <a:p>
             <a:pPr algn="l"/>
             <a:r>
-              <a:rPr sz="1000" b="0">
+              <a:rPr sz="950" b="0">
                 <a:solidFill>
                   <a:srgbClr val="1A1A1A"/>
                 </a:solidFill>
                 <a:latin typeface="맑은 고딕"/>
                 <a:ea typeface="맑은 고딕"/>
               </a:rPr>
-              <a:t>서 비동기 실행</a:t>
+              <a:t>승격을 끄는 안전 장치(do-no-harm)</a:t>
             </a:r>
           </a:p>
         </p:txBody>
@@ -6185,8 +6224,8 @@
         </p:nvSpPr>
         <p:spPr>
           <a:xfrm>
-            <a:off x="8275320" y="4700016"/>
-            <a:ext cx="914400" cy="1024128"/>
+            <a:off x="8549640" y="4700016"/>
+            <a:ext cx="822960" cy="1024128"/>
           </a:xfrm>
           <a:prstGeom prst="rect">
             <a:avLst/>
@@ -6221,14 +6260,14 @@
           <a:p>
             <a:pPr algn="ctr"/>
             <a:r>
-              <a:rPr sz="1000" b="0">
+              <a:rPr sz="950" b="0">
                 <a:solidFill>
                   <a:srgbClr val="1A1A1A"/>
                 </a:solidFill>
                 <a:latin typeface="맑은 고딕"/>
                 <a:ea typeface="맑은 고딕"/>
               </a:rPr>
-              <a:t>QA2</a:t>
+              <a:t>QA4 안정성</a:t>
             </a:r>
           </a:p>
         </p:txBody>
@@ -6241,8 +6280,8 @@
         </p:nvSpPr>
         <p:spPr>
           <a:xfrm>
-            <a:off x="9189720" y="4700016"/>
-            <a:ext cx="2606040" cy="1024128"/>
+            <a:off x="9372600" y="4700016"/>
+            <a:ext cx="2423160" cy="1024128"/>
           </a:xfrm>
           <a:prstGeom prst="rect">
             <a:avLst/>
@@ -6277,14 +6316,14 @@
           <a:p>
             <a:pPr algn="l"/>
             <a:r>
-              <a:rPr sz="1000" b="0">
+              <a:rPr sz="950" b="0">
                 <a:solidFill>
                   <a:srgbClr val="1A1A1A"/>
                 </a:solidFill>
                 <a:latin typeface="맑은 고딕"/>
                 <a:ea typeface="맑은 고딕"/>
               </a:rPr>
-              <a:t>coalescing [B], 나머지 [C]</a:t>
+              <a:t>[C] 미구현</a:t>
             </a:r>
           </a:p>
         </p:txBody>
@@ -6298,7 +6337,7 @@
         <p:spPr>
           <a:xfrm>
             <a:off x="365760" y="5824728"/>
-            <a:ext cx="11430000" cy="685800"/>
+            <a:ext cx="11430000" cy="548640"/>
           </a:xfrm>
           <a:prstGeom prst="rect">
             <a:avLst/>
@@ -6333,27 +6372,27 @@
           <a:p>
             <a:pPr algn="l"/>
             <a:r>
-              <a:rPr sz="1000" b="1">
+              <a:rPr sz="950" b="1">
                 <a:solidFill>
                   <a:srgbClr val="404040"/>
                 </a:solidFill>
                 <a:latin typeface="맑은 고딕"/>
                 <a:ea typeface="맑은 고딕"/>
               </a:rPr>
-              <a:t>적용 우선순위 제안: T1(QA4 직접 보완) &gt; T3(예측 의존 리스크) &gt; T2 잔여 항목 &gt; T4. T1, T3는 simulator 적용 전까지 효과를 수치로 주장하지 않는다.</a:t>
+              <a:t>T1은 이미 C1 설계(Data-Memory Affinity)에 포함된 구성요소를 평가에서 켠 것이다. 제거 변형으로 효과를 측정했다. T2~T4는 평가가 드러낸 약점에 대한 제안이며 simulator 적용 전까지 효과를 수치로 주</a:t>
             </a:r>
           </a:p>
           <a:p>
             <a:pPr algn="l"/>
             <a:r>
-              <a:rPr sz="1000" b="0">
+              <a:rPr sz="950" b="0">
                 <a:solidFill>
                   <a:srgbClr val="404040"/>
                 </a:solidFill>
                 <a:latin typeface="맑은 고딕"/>
                 <a:ea typeface="맑은 고딕"/>
               </a:rPr>
-              <a:t>택틱은 C2 구조에 추가되는 module(Descriptor Registry, Confidence Gate, Do-no-harm Guard)로 표현할 수 있다.</a:t>
+              <a:t>장하지 않는다.</a:t>
             </a:r>
           </a:p>
         </p:txBody>

--- a/doc-mk/DP1/DP1-complement-design-tactics.pptx
+++ b/doc-mk/DP1/DP1-complement-design-tactics.pptx
@@ -5314,7 +5314,7 @@
                 <a:latin typeface="맑은 고딕"/>
                 <a:ea typeface="맑은 고딕"/>
               </a:rPr>
-              <a:t>[B] 구현·측정됨: 처리량 x1.05 -&gt; x1.30, </a:t>
+              <a:t>[B] 구현·측정됨: 처리량 x1.05 -&gt; x1.30(O</a:t>
             </a:r>
           </a:p>
           <a:p>
@@ -5327,7 +5327,7 @@
                 <a:latin typeface="맑은 고딕"/>
                 <a:ea typeface="맑은 고딕"/>
               </a:rPr>
-              <a:t>QA2 ★★ -&gt; ★★★ (제거 변형 비교, 결과</a:t>
+              <a:t>racle 달성률 13% -&gt; 62%), TTFT P99 x1.2</a:t>
             </a:r>
           </a:p>
           <a:p>
@@ -5340,7 +5340,20 @@
                 <a:latin typeface="맑은 고딕"/>
                 <a:ea typeface="맑은 고딕"/>
               </a:rPr>
-              <a:t>4.7). 선택이 C2에서 C1로 바뀜</a:t>
+              <a:t>7 -&gt; x1.04 (제거 변형 비교, 결과 4.7). 별</a:t>
+            </a:r>
+          </a:p>
+          <a:p>
+            <a:pPr algn="l"/>
+            <a:r>
+              <a:rPr sz="950" b="0">
+                <a:solidFill>
+                  <a:srgbClr val="1A1A1A"/>
+                </a:solidFill>
+                <a:latin typeface="맑은 고딕"/>
+                <a:ea typeface="맑은 고딕"/>
+              </a:rPr>
+              <a:t>(v6)은 같아 선택은 불변</a:t>
             </a:r>
           </a:p>
         </p:txBody>
@@ -5797,7 +5810,7 @@
                 <a:latin typeface="맑은 고딕"/>
                 <a:ea typeface="맑은 고딕"/>
               </a:rPr>
-              <a:t>리량이 낮음(x1.30 대 x1.42), QA1 별 경계(1.30) 바로 아</a:t>
+              <a:t>리량이 낮음(x1.30 대 x1.42), Oracle 달성률 80% 기준 아</a:t>
             </a:r>
           </a:p>
           <a:p>
@@ -5810,7 +5823,7 @@
                 <a:latin typeface="맑은 고딕"/>
                 <a:ea typeface="맑은 고딕"/>
               </a:rPr>
-              <a:t>래</a:t>
+              <a:t>래(C1 62% 대 C2 83%)</a:t>
             </a:r>
           </a:p>
         </p:txBody>

--- a/doc-mk/DP1/DP1-complement-design-tactics.pptx
+++ b/doc-mk/DP1/DP1-complement-design-tactics.pptx
@@ -5314,7 +5314,7 @@
                 <a:latin typeface="맑은 고딕"/>
                 <a:ea typeface="맑은 고딕"/>
               </a:rPr>
-              <a:t>[B] 구현·측정됨: 처리량 x1.05 -&gt; x1.30(O</a:t>
+              <a:t>[B] 구현·측정됨: 처리량 x1.05 -&gt; x1.30, </a:t>
             </a:r>
           </a:p>
           <a:p>
@@ -5327,7 +5327,7 @@
                 <a:latin typeface="맑은 고딕"/>
                 <a:ea typeface="맑은 고딕"/>
               </a:rPr>
-              <a:t>racle 달성률 13% -&gt; 62%), TTFT P99 x1.2</a:t>
+              <a:t>QA2 ★★ -&gt; ★★★ (제거 변형 비교, 결과</a:t>
             </a:r>
           </a:p>
           <a:p>
@@ -5340,20 +5340,7 @@
                 <a:latin typeface="맑은 고딕"/>
                 <a:ea typeface="맑은 고딕"/>
               </a:rPr>
-              <a:t>7 -&gt; x1.04 (제거 변형 비교, 결과 4.7). 별</a:t>
-            </a:r>
-          </a:p>
-          <a:p>
-            <a:pPr algn="l"/>
-            <a:r>
-              <a:rPr sz="950" b="0">
-                <a:solidFill>
-                  <a:srgbClr val="1A1A1A"/>
-                </a:solidFill>
-                <a:latin typeface="맑은 고딕"/>
-                <a:ea typeface="맑은 고딕"/>
-              </a:rPr>
-              <a:t>(v6)은 같아 선택은 불변</a:t>
+              <a:t>4.7). 선택이 C2에서 C1로 바뀜</a:t>
             </a:r>
           </a:p>
         </p:txBody>
@@ -5810,7 +5797,7 @@
                 <a:latin typeface="맑은 고딕"/>
                 <a:ea typeface="맑은 고딕"/>
               </a:rPr>
-              <a:t>리량이 낮음(x1.30 대 x1.42), Oracle 달성률 80% 기준 아</a:t>
+              <a:t>리량이 낮음(x1.30 대 x1.42), QA1 별 경계(1.30) 바로 아</a:t>
             </a:r>
           </a:p>
           <a:p>
@@ -5823,7 +5810,7 @@
                 <a:latin typeface="맑은 고딕"/>
                 <a:ea typeface="맑은 고딕"/>
               </a:rPr>
-              <a:t>래(C1 62% 대 C2 83%)</a:t>
+              <a:t>래</a:t>
             </a:r>
           </a:p>
         </p:txBody>
